--- a/docs/common/liveries/nsi/template.pptx
+++ b/docs/common/liveries/nsi/template.pptx
@@ -128,7 +128,7 @@
         <p:spPr>
           <a:xfrm>
             <a:off x="731520" y="5534406"/>
-            <a:ext cx="4837839" cy="754380"/>
+            <a:ext cx="4765418" cy="754380"/>
           </a:xfrm>
           <a:prstGeom prst="rect">
             <a:avLst/>
@@ -676,7 +676,7 @@
         <p:spPr>
           <a:xfrm>
             <a:off x="731520" y="6309360"/>
-            <a:ext cx="2199018" cy="342900"/>
+            <a:ext cx="2166099" cy="342900"/>
           </a:xfrm>
           <a:prstGeom prst="rect">
             <a:avLst/>
@@ -1858,7 +1858,7 @@
         <p:spPr>
           <a:xfrm>
             <a:off x="731520" y="5534406"/>
-            <a:ext cx="4837839" cy="754380"/>
+            <a:ext cx="4765418" cy="754380"/>
           </a:xfrm>
           <a:prstGeom prst="rect">
             <a:avLst/>
@@ -2194,7 +2194,7 @@
         <p:spPr>
           <a:xfrm>
             <a:off x="731520" y="6309360"/>
-            <a:ext cx="2199018" cy="342900"/>
+            <a:ext cx="2166099" cy="342900"/>
           </a:xfrm>
           <a:prstGeom prst="rect">
             <a:avLst/>
@@ -2768,7 +2768,7 @@
         <p:spPr>
           <a:xfrm>
             <a:off x="731520" y="6309360"/>
-            <a:ext cx="2199018" cy="342900"/>
+            <a:ext cx="2166099" cy="342900"/>
           </a:xfrm>
           <a:prstGeom prst="rect">
             <a:avLst/>

--- a/docs/common/liveries/nsi/template.pptx
+++ b/docs/common/liveries/nsi/template.pptx
@@ -113,7 +113,31 @@
       </p:pic>
       <p:pic>
         <p:nvPicPr>
-          <p:cNvPr id="14" name="Sign-off (band)"/>
+          <p:cNvPr id="14" name="Logo (dark)"/>
+          <p:cNvPicPr>
+            <a:picLocks noChangeAspect="1"/>
+          </p:cNvPicPr>
+          <p:nvPr userDrawn="1"/>
+        </p:nvPicPr>
+        <p:blipFill>
+          <a:blip r:embed="rId2"/>
+          <a:stretch>
+            <a:fillRect/>
+          </a:stretch>
+        </p:blipFill>
+        <p:spPr>
+          <a:xfrm>
+            <a:off x="9075725" y="5260086"/>
+            <a:ext cx="2384755" cy="1303020"/>
+          </a:xfrm>
+          <a:prstGeom prst="rect">
+            <a:avLst/>
+          </a:prstGeom>
+        </p:spPr>
+      </p:pic>
+      <p:pic>
+        <p:nvPicPr>
+          <p:cNvPr id="15" name="Sign-off (dark)"/>
           <p:cNvPicPr>
             <a:picLocks noChangeAspect="1"/>
           </p:cNvPicPr>
@@ -128,16 +152,300 @@
         <p:spPr>
           <a:xfrm>
             <a:off x="731520" y="5534406"/>
-            <a:ext cx="4765418" cy="754380"/>
+            <a:ext cx="4765853" cy="754380"/>
           </a:xfrm>
           <a:prstGeom prst="rect">
             <a:avLst/>
           </a:prstGeom>
         </p:spPr>
       </p:pic>
+      <p:sp>
+        <p:nvSpPr>
+          <p:cNvPr id="16" name="Title tab"/>
+          <p:cNvSpPr/>
+          <p:nvPr userDrawn="1"/>
+        </p:nvSpPr>
+        <p:spPr>
+          <a:xfrm>
+            <a:off x="0" y="2366010"/>
+            <a:ext cx="219456" cy="960120"/>
+          </a:xfrm>
+          <a:prstGeom prst="rect">
+            <a:avLst/>
+          </a:prstGeom>
+          <a:solidFill>
+            <a:schemeClr val="accent4"/>
+          </a:solidFill>
+          <a:ln>
+            <a:noFill/>
+          </a:ln>
+        </p:spPr>
+      </p:sp>
+      <p:sp>
+        <p:nvSpPr>
+          <p:cNvPr id="17" name="Date"/>
+          <p:cNvSpPr>
+            <a:spLocks noGrp="1"/>
+          </p:cNvSpPr>
+          <p:nvPr>
+            <p:ph type="dt" idx="20"/>
+          </p:nvPr>
+        </p:nvSpPr>
+        <p:spPr>
+          <a:xfrm>
+            <a:off x="731520" y="1892808"/>
+            <a:ext cx="6339840" cy="274320"/>
+          </a:xfrm>
+          <a:prstGeom prst="rect">
+            <a:avLst/>
+          </a:prstGeom>
+        </p:spPr>
+        <p:txBody>
+          <a:bodyPr vert="horz" lIns="0" tIns="0" rIns="0" bIns="0" anchor="t">
+            <a:normAutofit/>
+          </a:bodyPr>
+          <a:lstStyle>
+            <a:lvl1pPr algn="l" marL="0" indent="0">
+              <a:spcBef>
+                <a:spcPts val="0"/>
+              </a:spcBef>
+              <a:buNone/>
+              <a:defRPr sz="1200" b="1" cap="all">
+                <a:solidFill>
+                  <a:srgbClr val="000000"/>
+                </a:solidFill>
+                <a:latin typeface="+mn-lt"/>
+              </a:defRPr>
+            </a:lvl1pPr>
+          </a:lstStyle>
+          <a:p>
+            <a:fld id="{B6F15528-21DE-4FAA-801E-634DDDAF4B2B}" type="datetime1">
+              <a:rPr lang="en-US"/>
+              <a:t>Date</a:t>
+            </a:fld>
+          </a:p>
+        </p:txBody>
+      </p:sp>
+      <p:sp>
+        <p:nvSpPr>
+          <p:cNvPr id="18" name="Title"/>
+          <p:cNvSpPr>
+            <a:spLocks noGrp="1"/>
+          </p:cNvSpPr>
+          <p:nvPr>
+            <p:ph type="ctrTitle"/>
+          </p:nvPr>
+        </p:nvSpPr>
+        <p:spPr>
+          <a:xfrm>
+            <a:off x="731520" y="2366010"/>
+            <a:ext cx="6339840" cy="960120"/>
+          </a:xfrm>
+          <a:prstGeom prst="rect">
+            <a:avLst/>
+          </a:prstGeom>
+        </p:spPr>
+        <p:txBody>
+          <a:bodyPr vert="horz" lIns="0" tIns="0" rIns="0" bIns="0" anchor="b">
+            <a:normAutofit/>
+          </a:bodyPr>
+          <a:lstStyle>
+            <a:lvl1pPr algn="l" marL="0" indent="0">
+              <a:spcBef>
+                <a:spcPts val="0"/>
+              </a:spcBef>
+              <a:buNone/>
+              <a:defRPr sz="3600" b="1">
+                <a:solidFill>
+                  <a:srgbClr val="000000"/>
+                </a:solidFill>
+                <a:latin typeface="+mn-lt"/>
+              </a:defRPr>
+            </a:lvl1pPr>
+          </a:lstStyle>
+          <a:p>
+            <a:r>
+              <a:rPr lang="en-US"/>
+              <a:t>Title</a:t>
+            </a:r>
+          </a:p>
+        </p:txBody>
+      </p:sp>
+      <p:cxnSp>
+        <p:nvCxnSpPr>
+          <p:cNvPr id="19" name="Title rule"/>
+          <p:cNvCxnSpPr/>
+          <p:nvPr userDrawn="1"/>
+        </p:nvCxnSpPr>
+        <p:spPr>
+          <a:xfrm>
+            <a:off x="731520" y="3429000"/>
+            <a:ext cx="1584960" cy="0"/>
+          </a:xfrm>
+          <a:prstGeom prst="line">
+            <a:avLst/>
+          </a:prstGeom>
+          <a:ln w="22631">
+            <a:solidFill>
+              <a:schemeClr val="accent1"/>
+            </a:solidFill>
+          </a:ln>
+        </p:spPr>
+      </p:cxnSp>
+      <p:sp>
+        <p:nvSpPr>
+          <p:cNvPr id="20" name="Subtitle"/>
+          <p:cNvSpPr>
+            <a:spLocks noGrp="1"/>
+          </p:cNvSpPr>
+          <p:nvPr>
+            <p:ph type="subTitle" idx="1"/>
+          </p:nvPr>
+        </p:nvSpPr>
+        <p:spPr>
+          <a:xfrm>
+            <a:off x="731520" y="3566160"/>
+            <a:ext cx="6339840" cy="1261872"/>
+          </a:xfrm>
+          <a:prstGeom prst="rect">
+            <a:avLst/>
+          </a:prstGeom>
+        </p:spPr>
+        <p:txBody>
+          <a:bodyPr vert="horz" lIns="0" tIns="0" rIns="0" bIns="0" anchor="t">
+            <a:normAutofit/>
+          </a:bodyPr>
+          <a:lstStyle>
+            <a:lvl1pPr algn="l" marL="0" indent="0">
+              <a:spcBef>
+                <a:spcPts val="0"/>
+              </a:spcBef>
+              <a:buNone/>
+              <a:defRPr sz="1800" b="0">
+                <a:solidFill>
+                  <a:srgbClr val="000000"/>
+                </a:solidFill>
+                <a:latin typeface="+mn-lt"/>
+              </a:defRPr>
+            </a:lvl1pPr>
+          </a:lstStyle>
+          <a:p>
+            <a:r>
+              <a:rPr lang="en-US"/>
+              <a:t>Subtitle</a:t>
+            </a:r>
+          </a:p>
+        </p:txBody>
+      </p:sp>
+      <p:sp>
+        <p:nvSpPr>
+          <p:cNvPr id="21" name="Slide Number Placeholder"/>
+          <p:cNvSpPr>
+            <a:spLocks noGrp="1"/>
+          </p:cNvSpPr>
+          <p:nvPr>
+            <p:ph type="sldNum" sz="quarter" idx="22"/>
+          </p:nvPr>
+        </p:nvSpPr>
+        <p:spPr>
+          <a:xfrm>
+            <a:off x="11704320" y="6480810"/>
+            <a:ext cx="475488" cy="363474"/>
+          </a:xfrm>
+        </p:spPr>
+        <p:txBody>
+          <a:bodyPr anchor="ctr"/>
+          <a:lstStyle>
+            <a:lvl1pPr algn="ctr">
+              <a:defRPr sz="1200" b="1">
+                <a:solidFill>
+                  <a:srgbClr val="000000"/>
+                </a:solidFill>
+              </a:defRPr>
+            </a:lvl1pPr>
+          </a:lstStyle>
+          <a:p>
+            <a:fld id="{C5EF2332-01BF-834F-8236-50238282D533}" type="slidenum">
+              <a:rPr lang="en-US"/>
+              <a:t>‹#›</a:t>
+            </a:fld>
+          </a:p>
+        </p:txBody>
+      </p:sp>
+      <p:sp>
+        <p:nvSpPr>
+          <p:cNvPr id="23" name="Footer Placeholder"/>
+          <p:cNvSpPr>
+            <a:spLocks noGrp="1"/>
+          </p:cNvSpPr>
+          <p:nvPr>
+            <p:ph type="ftr" sz="quarter" idx="21"/>
+          </p:nvPr>
+        </p:nvSpPr>
+        <p:spPr>
+          <a:xfrm>
+            <a:off x="560832" y="6556248"/>
+            <a:ext cx="4145280" cy="185166"/>
+          </a:xfrm>
+          <a:prstGeom prst="rect">
+            <a:avLst/>
+          </a:prstGeom>
+        </p:spPr>
+        <p:txBody>
+          <a:bodyPr vert="horz" lIns="0" tIns="0" rIns="0" bIns="0" anchor="ctr"/>
+          <a:lstStyle>
+            <a:lvl1pPr algn="l">
+              <a:defRPr sz="900">
+                <a:solidFill>
+                  <a:srgbClr val="000000"/>
+                </a:solidFill>
+              </a:defRPr>
+            </a:lvl1pPr>
+          </a:lstStyle>
+          <a:p>
+            <a:r>
+              <a:rPr lang="en-US"/>
+              <a:t/>
+            </a:r>
+          </a:p>
+        </p:txBody>
+      </p:sp>
+    </p:spTree>
+  </p:cSld>
+  <p:clrMapOvr>
+    <a:masterClrMapping/>
+  </p:clrMapOvr>
+</p:sldLayout>
+</file>
+
+<file path=ppt/slideLayouts/slideLayout10.xml><?xml version="1.0" encoding="utf-8"?>
+<p:sldLayout xmlns:a="http://schemas.openxmlformats.org/drawingml/2006/main" xmlns:r="http://schemas.openxmlformats.org/officeDocument/2006/relationships" xmlns:p="http://schemas.openxmlformats.org/presentationml/2006/main" type="obj" preserve="1" showMasterSp="0">
+  <p:cSld name="Closing (light)">
+    <p:bg>
+      <p:bgPr>
+        <a:solidFill>
+          <a:schemeClr val="bg1"/>
+        </a:solidFill>
+        <a:effectLst/>
+      </p:bgPr>
+    </p:bg>
+    <p:spTree>
+      <p:nvGrpSpPr>
+        <p:cNvPr id="1" name=""/>
+        <p:cNvGrpSpPr/>
+        <p:nvPr/>
+      </p:nvGrpSpPr>
+      <p:grpSpPr>
+        <a:xfrm>
+          <a:off x="0" y="0"/>
+          <a:ext cx="0" cy="0"/>
+          <a:chOff x="0" y="0"/>
+          <a:chExt cx="0" cy="0"/>
+        </a:xfrm>
+      </p:grpSpPr>
       <p:pic>
         <p:nvPicPr>
-          <p:cNvPr id="15" name="Logo (band)"/>
+          <p:cNvPr id="11" name="Logo (background)"/>
           <p:cNvPicPr>
             <a:picLocks noChangeAspect="1"/>
           </p:cNvPicPr>
@@ -151,24 +459,48 @@
         </p:blipFill>
         <p:spPr>
           <a:xfrm>
-            <a:off x="9075953" y="5260086"/>
-            <a:ext cx="2384527" cy="1303020"/>
+            <a:off x="731520" y="617220"/>
+            <a:ext cx="1254557" cy="685800"/>
           </a:xfrm>
           <a:prstGeom prst="rect">
             <a:avLst/>
           </a:prstGeom>
         </p:spPr>
       </p:pic>
-      <p:sp>
-        <p:nvSpPr>
-          <p:cNvPr id="16" name="Title tab"/>
+      <p:pic>
+        <p:nvPicPr>
+          <p:cNvPr id="12" name="Sign-off (background)"/>
+          <p:cNvPicPr>
+            <a:picLocks noChangeAspect="1"/>
+          </p:cNvPicPr>
+          <p:nvPr userDrawn="1"/>
+        </p:nvPicPr>
+        <p:blipFill>
+          <a:blip r:embed="rId3"/>
+          <a:stretch>
+            <a:fillRect/>
+          </a:stretch>
+        </p:blipFill>
+        <p:spPr>
+          <a:xfrm>
+            <a:off x="731520" y="6309360"/>
+            <a:ext cx="2166518" cy="342900"/>
+          </a:xfrm>
+          <a:prstGeom prst="rect">
+            <a:avLst/>
+          </a:prstGeom>
+        </p:spPr>
+      </p:pic>
+      <p:sp>
+        <p:nvSpPr>
+          <p:cNvPr id="13" name="Title tab"/>
           <p:cNvSpPr/>
           <p:nvPr userDrawn="1"/>
         </p:nvSpPr>
         <p:spPr>
           <a:xfrm>
-            <a:off x="0" y="2578608"/>
-            <a:ext cx="219456" cy="960120"/>
+            <a:off x="0" y="3154680"/>
+            <a:ext cx="219456" cy="514350"/>
           </a:xfrm>
           <a:prstGeom prst="rect">
             <a:avLst/>
@@ -183,18 +515,62 @@
       </p:sp>
       <p:sp>
         <p:nvSpPr>
-          <p:cNvPr id="17" name="Date"/>
-          <p:cNvSpPr>
-            <a:spLocks noGrp="1"/>
-          </p:cNvSpPr>
-          <p:nvPr>
-            <p:ph type="dt" idx="20"/>
-          </p:nvPr>
-        </p:nvSpPr>
-        <p:spPr>
-          <a:xfrm>
-            <a:off x="731520" y="2269998"/>
-            <a:ext cx="6339840" cy="274320"/>
+          <p:cNvPr id="14" name="Title 1"/>
+          <p:cNvSpPr>
+            <a:spLocks noGrp="1"/>
+          </p:cNvSpPr>
+          <p:nvPr>
+            <p:ph type="title"/>
+          </p:nvPr>
+        </p:nvSpPr>
+        <p:spPr>
+          <a:xfrm>
+            <a:off x="731520" y="1508760"/>
+            <a:ext cx="7559040" cy="2263140"/>
+          </a:xfrm>
+          <a:prstGeom prst="rect">
+            <a:avLst/>
+          </a:prstGeom>
+        </p:spPr>
+        <p:txBody>
+          <a:bodyPr vert="horz" lIns="0" tIns="0" rIns="0" bIns="0" anchor="b">
+            <a:normAutofit/>
+          </a:bodyPr>
+          <a:lstStyle>
+            <a:lvl1pPr algn="l">
+              <a:lnSpc>
+                <a:spcPct val="90000"/>
+              </a:lnSpc>
+              <a:defRPr sz="4400" b="1">
+                <a:solidFill>
+                  <a:srgbClr val="000000"/>
+                </a:solidFill>
+                <a:latin typeface="+mj-lt"/>
+              </a:defRPr>
+            </a:lvl1pPr>
+          </a:lstStyle>
+          <a:p>
+            <a:r>
+              <a:rPr lang="en-US"/>
+              <a:t>Thank you</a:t>
+            </a:r>
+          </a:p>
+        </p:txBody>
+      </p:sp>
+      <p:sp>
+        <p:nvSpPr>
+          <p:cNvPr id="15" name="Content Placeholder 2"/>
+          <p:cNvSpPr>
+            <a:spLocks noGrp="1"/>
+          </p:cNvSpPr>
+          <p:nvPr>
+            <p:ph idx="1"/>
+          </p:nvPr>
+        </p:nvSpPr>
+        <p:spPr>
+          <a:xfrm>
+            <a:off x="731520" y="3977640"/>
+            <a:ext cx="7559040" cy="2057400"/>
           </a:xfrm>
           <a:prstGeom prst="rect">
             <a:avLst/>
@@ -205,141 +581,39 @@
             <a:normAutofit/>
           </a:bodyPr>
           <a:lstStyle>
-            <a:lvl1pPr algn="l" marL="0" indent="0">
-              <a:spcBef>
-                <a:spcPts val="0"/>
-              </a:spcBef>
-              <a:buNone/>
-              <a:defRPr sz="1200" b="1" cap="all">
+            <a:lvl1pPr>
+              <a:defRPr sz="2000">
                 <a:solidFill>
                   <a:srgbClr val="000000"/>
                 </a:solidFill>
-                <a:latin typeface="+mn-lt"/>
-              </a:defRPr>
-            </a:lvl1pPr>
-          </a:lstStyle>
-          <a:p>
-            <a:fld id="{B6F15528-21DE-4FAA-801E-634DDDAF4B2B}" type="datetime1">
-              <a:rPr lang="en-US"/>
-              <a:t>Date</a:t>
-            </a:fld>
-          </a:p>
-        </p:txBody>
-      </p:sp>
-      <p:sp>
-        <p:nvSpPr>
-          <p:cNvPr id="18" name="Title"/>
-          <p:cNvSpPr>
-            <a:spLocks noGrp="1"/>
-          </p:cNvSpPr>
-          <p:nvPr>
-            <p:ph type="ctrTitle"/>
-          </p:nvPr>
-        </p:nvSpPr>
-        <p:spPr>
-          <a:xfrm>
-            <a:off x="731520" y="2578608"/>
-            <a:ext cx="6339840" cy="960120"/>
-          </a:xfrm>
-          <a:prstGeom prst="rect">
-            <a:avLst/>
-          </a:prstGeom>
-        </p:spPr>
-        <p:txBody>
-          <a:bodyPr vert="horz" lIns="0" tIns="0" rIns="0" bIns="0" anchor="t">
-            <a:normAutofit/>
-          </a:bodyPr>
-          <a:lstStyle>
-            <a:lvl1pPr algn="l" marL="0" indent="0">
-              <a:spcBef>
-                <a:spcPts val="0"/>
-              </a:spcBef>
-              <a:buNone/>
-              <a:defRPr sz="3600" b="1">
+              </a:defRPr>
+            </a:lvl1pPr>
+            <a:lvl2pPr>
+              <a:defRPr sz="1800">
                 <a:solidFill>
                   <a:srgbClr val="000000"/>
                 </a:solidFill>
-                <a:latin typeface="+mn-lt"/>
-              </a:defRPr>
-            </a:lvl1pPr>
-          </a:lstStyle>
-          <a:p>
-            <a:r>
-              <a:rPr lang="en-US"/>
-              <a:t>Title</a:t>
-            </a:r>
-          </a:p>
-        </p:txBody>
-      </p:sp>
-      <p:cxnSp>
-        <p:nvCxnSpPr>
-          <p:cNvPr id="19" name="Title rule"/>
-          <p:cNvCxnSpPr/>
-          <p:nvPr userDrawn="1"/>
-        </p:nvCxnSpPr>
-        <p:spPr>
-          <a:xfrm>
-            <a:off x="731520" y="3641598"/>
-            <a:ext cx="792480" cy="0"/>
-          </a:xfrm>
-          <a:prstGeom prst="line">
-            <a:avLst/>
-          </a:prstGeom>
-          <a:ln w="19050">
-            <a:solidFill>
-              <a:schemeClr val="accent1"/>
-            </a:solidFill>
-          </a:ln>
-        </p:spPr>
-      </p:cxnSp>
-      <p:sp>
-        <p:nvSpPr>
-          <p:cNvPr id="20" name="Subtitle"/>
-          <p:cNvSpPr>
-            <a:spLocks noGrp="1"/>
-          </p:cNvSpPr>
-          <p:nvPr>
-            <p:ph type="subTitle" idx="1"/>
-          </p:nvPr>
-        </p:nvSpPr>
-        <p:spPr>
-          <a:xfrm>
-            <a:off x="731520" y="3778758"/>
-            <a:ext cx="6339840" cy="1049274"/>
-          </a:xfrm>
-          <a:prstGeom prst="rect">
-            <a:avLst/>
-          </a:prstGeom>
-        </p:spPr>
-        <p:txBody>
-          <a:bodyPr vert="horz" lIns="0" tIns="0" rIns="0" bIns="0" anchor="t">
-            <a:normAutofit/>
-          </a:bodyPr>
-          <a:lstStyle>
-            <a:lvl1pPr algn="l" marL="0" indent="0">
-              <a:spcBef>
-                <a:spcPts val="0"/>
-              </a:spcBef>
-              <a:buNone/>
-              <a:defRPr sz="1800" b="0">
+              </a:defRPr>
+            </a:lvl2pPr>
+            <a:lvl3pPr>
+              <a:defRPr sz="1600">
                 <a:solidFill>
                   <a:srgbClr val="000000"/>
                 </a:solidFill>
-                <a:latin typeface="+mn-lt"/>
-              </a:defRPr>
-            </a:lvl1pPr>
-          </a:lstStyle>
-          <a:p>
-            <a:r>
-              <a:rPr lang="en-US"/>
-              <a:t>Subtitle</a:t>
-            </a:r>
-          </a:p>
-        </p:txBody>
-      </p:sp>
-      <p:sp>
-        <p:nvSpPr>
-          <p:cNvPr id="21" name="Slide Number Placeholder"/>
+              </a:defRPr>
+            </a:lvl3pPr>
+          </a:lstStyle>
+          <a:p>
+            <a:r>
+              <a:rPr lang="en-US"/>
+              <a:t>Contact details</a:t>
+            </a:r>
+          </a:p>
+        </p:txBody>
+      </p:sp>
+      <p:sp>
+        <p:nvSpPr>
+          <p:cNvPr id="16" name="Slide Number Placeholder"/>
           <p:cNvSpPr>
             <a:spLocks noGrp="1"/>
           </p:cNvSpPr>
@@ -359,7 +633,7 @@
             <a:lvl1pPr algn="ctr">
               <a:defRPr sz="1200" b="1">
                 <a:solidFill>
-                  <a:srgbClr val="FFFFFF"/>
+                  <a:srgbClr val="000000"/>
                 </a:solidFill>
               </a:defRPr>
             </a:lvl1pPr>
@@ -374,7 +648,45 @@
       </p:sp>
       <p:sp>
         <p:nvSpPr>
-          <p:cNvPr id="23" name="Footer Placeholder"/>
+          <p:cNvPr id="17" name="Date Placeholder"/>
+          <p:cNvSpPr>
+            <a:spLocks noGrp="1"/>
+          </p:cNvSpPr>
+          <p:nvPr>
+            <p:ph type="dt" sz="half" idx="20"/>
+          </p:nvPr>
+        </p:nvSpPr>
+        <p:spPr>
+          <a:xfrm>
+            <a:off x="9022080" y="6556248"/>
+            <a:ext cx="1377696" cy="185166"/>
+          </a:xfrm>
+          <a:prstGeom prst="rect">
+            <a:avLst/>
+          </a:prstGeom>
+        </p:spPr>
+        <p:txBody>
+          <a:bodyPr vert="horz" lIns="0" tIns="0" rIns="0" bIns="0" anchor="ctr"/>
+          <a:lstStyle>
+            <a:lvl1pPr algn="r">
+              <a:defRPr sz="900">
+                <a:solidFill>
+                  <a:srgbClr val="000000"/>
+                </a:solidFill>
+              </a:defRPr>
+            </a:lvl1pPr>
+          </a:lstStyle>
+          <a:p>
+            <a:r>
+              <a:rPr lang="en-US"/>
+              <a:t/>
+            </a:r>
+          </a:p>
+        </p:txBody>
+      </p:sp>
+      <p:sp>
+        <p:nvSpPr>
+          <p:cNvPr id="18" name="Footer Placeholder"/>
           <p:cNvSpPr>
             <a:spLocks noGrp="1"/>
           </p:cNvSpPr>
@@ -397,7 +709,7 @@
             <a:lvl1pPr algn="l">
               <a:defRPr sz="900">
                 <a:solidFill>
-                  <a:srgbClr val="FFFFFF"/>
+                  <a:srgbClr val="000000"/>
                 </a:solidFill>
               </a:defRPr>
             </a:lvl1pPr>
@@ -637,7 +949,7 @@
       </p:grpSpPr>
       <p:pic>
         <p:nvPicPr>
-          <p:cNvPr id="11" name="Logo (dark)"/>
+          <p:cNvPr id="11" name="Logo (primary)"/>
           <p:cNvPicPr>
             <a:picLocks noChangeAspect="1"/>
           </p:cNvPicPr>
@@ -652,7 +964,7 @@
         <p:spPr>
           <a:xfrm>
             <a:off x="731520" y="548640"/>
-            <a:ext cx="1004011" cy="548640"/>
+            <a:ext cx="1004621" cy="548640"/>
           </a:xfrm>
           <a:prstGeom prst="rect">
             <a:avLst/>
@@ -661,7 +973,7 @@
       </p:pic>
       <p:pic>
         <p:nvPicPr>
-          <p:cNvPr id="12" name="Sign-off (dark)"/>
+          <p:cNvPr id="12" name="Sign-off (primary)"/>
           <p:cNvPicPr>
             <a:picLocks noChangeAspect="1"/>
           </p:cNvPicPr>
@@ -676,7 +988,7 @@
         <p:spPr>
           <a:xfrm>
             <a:off x="731520" y="6309360"/>
-            <a:ext cx="2166099" cy="342900"/>
+            <a:ext cx="2166518" cy="342900"/>
           </a:xfrm>
           <a:prstGeom prst="rect">
             <a:avLst/>
@@ -695,15 +1007,15 @@
         </p:nvSpPr>
         <p:spPr>
           <a:xfrm>
-            <a:off x="731520" y="3048000"/>
-            <a:ext cx="7559040" cy="838200"/>
-          </a:xfrm>
-          <a:prstGeom prst="rect">
-            <a:avLst/>
-          </a:prstGeom>
-        </p:spPr>
-        <p:txBody>
-          <a:bodyPr lIns="0" tIns="0" rIns="0" bIns="0" anchor="t">
+            <a:off x="731520" y="2758288"/>
+            <a:ext cx="7559040" cy="822960"/>
+          </a:xfrm>
+          <a:prstGeom prst="rect">
+            <a:avLst/>
+          </a:prstGeom>
+        </p:spPr>
+        <p:txBody>
+          <a:bodyPr lIns="0" tIns="0" rIns="0" bIns="0" anchor="b">
             <a:normAutofit/>
           </a:bodyPr>
           <a:lstStyle>
@@ -739,8 +1051,8 @@
         </p:nvSpPr>
         <p:spPr>
           <a:xfrm>
-            <a:off x="731520" y="3962400"/>
-            <a:ext cx="7315200" cy="914400"/>
+            <a:off x="731520" y="3649828"/>
+            <a:ext cx="7559040" cy="912114"/>
           </a:xfrm>
           <a:prstGeom prst="rect">
             <a:avLst/>
@@ -1843,7 +2155,31 @@
       </p:pic>
       <p:pic>
         <p:nvPicPr>
-          <p:cNvPr id="12" name="Sign-off (band)"/>
+          <p:cNvPr id="12" name="Logo (dark)"/>
+          <p:cNvPicPr>
+            <a:picLocks noChangeAspect="1"/>
+          </p:cNvPicPr>
+          <p:nvPr userDrawn="1"/>
+        </p:nvPicPr>
+        <p:blipFill>
+          <a:blip r:embed="rId2"/>
+          <a:stretch>
+            <a:fillRect/>
+          </a:stretch>
+        </p:blipFill>
+        <p:spPr>
+          <a:xfrm>
+            <a:off x="9075725" y="5260086"/>
+            <a:ext cx="2384755" cy="1303020"/>
+          </a:xfrm>
+          <a:prstGeom prst="rect">
+            <a:avLst/>
+          </a:prstGeom>
+        </p:spPr>
+      </p:pic>
+      <p:pic>
+        <p:nvPicPr>
+          <p:cNvPr id="13" name="Sign-off (dark)"/>
           <p:cNvPicPr>
             <a:picLocks noChangeAspect="1"/>
           </p:cNvPicPr>
@@ -1858,31 +2194,7 @@
         <p:spPr>
           <a:xfrm>
             <a:off x="731520" y="5534406"/>
-            <a:ext cx="4765418" cy="754380"/>
-          </a:xfrm>
-          <a:prstGeom prst="rect">
-            <a:avLst/>
-          </a:prstGeom>
-        </p:spPr>
-      </p:pic>
-      <p:pic>
-        <p:nvPicPr>
-          <p:cNvPr id="13" name="Logo (band)"/>
-          <p:cNvPicPr>
-            <a:picLocks noChangeAspect="1"/>
-          </p:cNvPicPr>
-          <p:nvPr userDrawn="1"/>
-        </p:nvPicPr>
-        <p:blipFill>
-          <a:blip r:embed="rId2"/>
-          <a:stretch>
-            <a:fillRect/>
-          </a:stretch>
-        </p:blipFill>
-        <p:spPr>
-          <a:xfrm>
-            <a:off x="9075953" y="5260086"/>
-            <a:ext cx="2384527" cy="1303020"/>
+            <a:ext cx="4765853" cy="754380"/>
           </a:xfrm>
           <a:prstGeom prst="rect">
             <a:avLst/>
@@ -1897,7 +2209,7 @@
         </p:nvSpPr>
         <p:spPr>
           <a:xfrm>
-            <a:off x="0" y="2537460"/>
+            <a:off x="0" y="2105406"/>
             <a:ext cx="219456" cy="514350"/>
           </a:xfrm>
           <a:prstGeom prst="rect">
@@ -1923,8 +2235,8 @@
         </p:nvSpPr>
         <p:spPr>
           <a:xfrm>
-            <a:off x="731520" y="2057400"/>
-            <a:ext cx="7559040" cy="1097280"/>
+            <a:off x="731520" y="685800"/>
+            <a:ext cx="7559040" cy="2036826"/>
           </a:xfrm>
           <a:prstGeom prst="rect">
             <a:avLst/>
@@ -1967,8 +2279,8 @@
         </p:nvSpPr>
         <p:spPr>
           <a:xfrm>
-            <a:off x="731520" y="3360420"/>
-            <a:ext cx="7071360" cy="2468880"/>
+            <a:off x="731520" y="2928366"/>
+            <a:ext cx="7559040" cy="1831086"/>
           </a:xfrm>
           <a:prstGeom prst="rect">
             <a:avLst/>
@@ -2155,7 +2467,7 @@
       </p:grpSpPr>
       <p:pic>
         <p:nvPicPr>
-          <p:cNvPr id="11" name="Logo (light)"/>
+          <p:cNvPr id="11" name="Logo (background)"/>
           <p:cNvPicPr>
             <a:picLocks noChangeAspect="1"/>
           </p:cNvPicPr>
@@ -2170,7 +2482,7 @@
         <p:spPr>
           <a:xfrm>
             <a:off x="731520" y="411480"/>
-            <a:ext cx="1129513" cy="617220"/>
+            <a:ext cx="1128979" cy="617220"/>
           </a:xfrm>
           <a:prstGeom prst="rect">
             <a:avLst/>
@@ -2179,7 +2491,7 @@
       </p:pic>
       <p:pic>
         <p:nvPicPr>
-          <p:cNvPr id="12" name="Sign-off (light)"/>
+          <p:cNvPr id="12" name="Sign-off (background)"/>
           <p:cNvPicPr>
             <a:picLocks noChangeAspect="1"/>
           </p:cNvPicPr>
@@ -2194,7 +2506,7 @@
         <p:spPr>
           <a:xfrm>
             <a:off x="731520" y="6309360"/>
-            <a:ext cx="2166099" cy="342900"/>
+            <a:ext cx="2166518" cy="342900"/>
           </a:xfrm>
           <a:prstGeom prst="rect">
             <a:avLst/>
@@ -2209,7 +2521,7 @@
         </p:nvSpPr>
         <p:spPr>
           <a:xfrm>
-            <a:off x="0" y="2948940"/>
+            <a:off x="0" y="1748790"/>
             <a:ext cx="219456" cy="1097280"/>
           </a:xfrm>
           <a:prstGeom prst="rect">
@@ -2235,8 +2547,8 @@
         </p:nvSpPr>
         <p:spPr>
           <a:xfrm>
-            <a:off x="731520" y="2571750"/>
-            <a:ext cx="5486400" cy="308610"/>
+            <a:off x="731520" y="1371600"/>
+            <a:ext cx="6096000" cy="308610"/>
           </a:xfrm>
           <a:prstGeom prst="rect">
             <a:avLst/>
@@ -2280,7 +2592,7 @@
         </p:nvSpPr>
         <p:spPr>
           <a:xfrm>
-            <a:off x="731520" y="2948940"/>
+            <a:off x="731520" y="1748790"/>
             <a:ext cx="6096000" cy="1097280"/>
           </a:xfrm>
           <a:prstGeom prst="rect">
@@ -2321,13 +2633,13 @@
         </p:nvCxnSpPr>
         <p:spPr>
           <a:xfrm>
-            <a:off x="731520" y="4217670"/>
-            <a:ext cx="792480" cy="0"/>
+            <a:off x="731520" y="3017520"/>
+            <a:ext cx="1584960" cy="0"/>
           </a:xfrm>
           <a:prstGeom prst="line">
             <a:avLst/>
           </a:prstGeom>
-          <a:ln w="19050">
+          <a:ln w="22631">
             <a:solidFill>
               <a:schemeClr val="accent1"/>
             </a:solidFill>
@@ -2346,8 +2658,8 @@
         </p:nvSpPr>
         <p:spPr>
           <a:xfrm>
-            <a:off x="731520" y="4389120"/>
-            <a:ext cx="6096000" cy="1508760"/>
+            <a:off x="731520" y="3188970"/>
+            <a:ext cx="6096000" cy="2708910"/>
           </a:xfrm>
           <a:prstGeom prst="rect">
             <a:avLst/>
@@ -2618,7 +2930,7 @@
       </p:sp>
       <p:sp>
         <p:nvSpPr>
-          <p:cNvPr id="17" name="Slide Number Placeholder"/>
+          <p:cNvPr id="18" name="Slide Number Placeholder"/>
           <p:cNvSpPr>
             <a:spLocks noGrp="1"/>
           </p:cNvSpPr>
@@ -2653,7 +2965,7 @@
       </p:sp>
       <p:sp>
         <p:nvSpPr>
-          <p:cNvPr id="18" name="Date Placeholder"/>
+          <p:cNvPr id="19" name="Date Placeholder"/>
           <p:cNvSpPr>
             <a:spLocks noGrp="1"/>
           </p:cNvSpPr>
@@ -2691,7 +3003,7 @@
       </p:sp>
       <p:sp>
         <p:nvSpPr>
-          <p:cNvPr id="19" name="Footer Placeholder"/>
+          <p:cNvPr id="20" name="Footer Placeholder"/>
           <p:cNvSpPr>
             <a:spLocks noGrp="1"/>
           </p:cNvSpPr>
@@ -2753,7 +3065,7 @@
       </p:pic>
       <p:pic>
         <p:nvPicPr>
-          <p:cNvPr id="20" name="Sign-off (light)"/>
+          <p:cNvPr id="17" name="Sign-off (light)"/>
           <p:cNvPicPr>
             <a:picLocks noChangeAspect="1"/>
           </p:cNvPicPr>
@@ -2788,6 +3100,7 @@
     <p:sldLayoutId id="2147483655" r:id="rId16"/>
     <p:sldLayoutId id="2147483656" r:id="rId17"/>
     <p:sldLayoutId id="2147483657" r:id="rId18"/>
+    <p:sldLayoutId id="2147483658" r:id="rId19"/>
   </p:sldLayoutIdLst>
   <p:txStyles>
     <p:titleStyle>

--- a/docs/common/liveries/nsi/template.pptx
+++ b/docs/common/liveries/nsi/template.pptx
@@ -210,7 +210,7 @@
                 <a:spcPts val="0"/>
               </a:spcBef>
               <a:buNone/>
-              <a:defRPr sz="1200" b="1" cap="all">
+              <a:defRPr sz="1008" b="1" cap="all">
                 <a:solidFill>
                   <a:srgbClr val="000000"/>
                 </a:solidFill>
@@ -255,7 +255,7 @@
                 <a:spcPts val="0"/>
               </a:spcBef>
               <a:buNone/>
-              <a:defRPr sz="3600" b="1">
+              <a:defRPr sz="3863" b="1">
                 <a:solidFill>
                   <a:srgbClr val="000000"/>
                 </a:solidFill>
@@ -321,7 +321,7 @@
                 <a:spcPts val="0"/>
               </a:spcBef>
               <a:buNone/>
-              <a:defRPr sz="1800" b="0">
+              <a:defRPr sz="1679" b="0">
                 <a:solidFill>
                   <a:srgbClr val="000000"/>
                 </a:solidFill>
@@ -541,7 +541,7 @@
               <a:lnSpc>
                 <a:spcPct val="90000"/>
               </a:lnSpc>
-              <a:defRPr sz="4400" b="1">
+              <a:defRPr sz="4366" b="1">
                 <a:solidFill>
                   <a:srgbClr val="000000"/>
                 </a:solidFill>
@@ -582,21 +582,21 @@
           </a:bodyPr>
           <a:lstStyle>
             <a:lvl1pPr>
-              <a:defRPr sz="2000">
+              <a:defRPr sz="1679">
                 <a:solidFill>
                   <a:srgbClr val="000000"/>
                 </a:solidFill>
               </a:defRPr>
             </a:lvl1pPr>
             <a:lvl2pPr>
-              <a:defRPr sz="1800">
+              <a:defRPr sz="1511">
                 <a:solidFill>
                   <a:srgbClr val="000000"/>
                 </a:solidFill>
               </a:defRPr>
             </a:lvl2pPr>
             <a:lvl3pPr>
-              <a:defRPr sz="1600">
+              <a:defRPr sz="1360">
                 <a:solidFill>
                   <a:srgbClr val="000000"/>
                 </a:solidFill>
@@ -1023,7 +1023,7 @@
               <a:lnSpc>
                 <a:spcPct val="90000"/>
               </a:lnSpc>
-              <a:defRPr sz="4400" b="1" cap="none" baseline="0">
+              <a:defRPr sz="4366" b="1" cap="none" baseline="0">
                 <a:solidFill>
                   <a:srgbClr val="000000"/>
                 </a:solidFill>
@@ -1068,7 +1068,7 @@
                 <a:spcPts val="0"/>
               </a:spcBef>
               <a:buNone/>
-              <a:defRPr sz="1800" b="0">
+              <a:defRPr sz="1847" b="0">
                 <a:solidFill>
                   <a:srgbClr val="000000"/>
                 </a:solidFill>
@@ -1494,7 +1494,7 @@
           <a:lstStyle>
             <a:lvl1pPr marL="0" indent="0">
               <a:buNone/>
-              <a:defRPr sz="1800" b="1">
+              <a:defRPr sz="1847" b="1">
                 <a:solidFill>
                   <a:schemeClr val="tx2"/>
                 </a:solidFill>
@@ -1565,7 +1565,7 @@
           <a:lstStyle>
             <a:lvl1pPr marL="0" indent="0">
               <a:buNone/>
-              <a:defRPr sz="1800" b="1">
+              <a:defRPr sz="1847" b="1">
                 <a:solidFill>
                   <a:schemeClr val="tx2"/>
                 </a:solidFill>
@@ -1771,7 +1771,7 @@
           </a:bodyPr>
           <a:lstStyle>
             <a:lvl1pPr algn="l">
-              <a:defRPr sz="2000" b="1"/>
+              <a:defRPr sz="1847" b="1"/>
             </a:lvl1pPr>
           </a:lstStyle>
           <a:p>
@@ -1838,7 +1838,7 @@
           <a:lstStyle>
             <a:lvl1pPr marL="0" indent="0">
               <a:buNone/>
-              <a:defRPr sz="1400"/>
+              <a:defRPr sz="1427"/>
             </a:lvl1pPr>
           </a:lstStyle>
           <a:p>
@@ -2251,7 +2251,7 @@
               <a:lnSpc>
                 <a:spcPct val="90000"/>
               </a:lnSpc>
-              <a:defRPr sz="4400" b="1">
+              <a:defRPr sz="4366" b="1">
                 <a:solidFill>
                   <a:srgbClr val="FFFFFF"/>
                 </a:solidFill>
@@ -2292,21 +2292,21 @@
           </a:bodyPr>
           <a:lstStyle>
             <a:lvl1pPr>
-              <a:defRPr sz="2000">
+              <a:defRPr sz="1679">
                 <a:solidFill>
                   <a:srgbClr val="FFFFFF"/>
                 </a:solidFill>
               </a:defRPr>
             </a:lvl1pPr>
             <a:lvl2pPr>
-              <a:defRPr sz="1800">
+              <a:defRPr sz="1511">
                 <a:solidFill>
                   <a:srgbClr val="FFFFFF"/>
                 </a:solidFill>
               </a:defRPr>
             </a:lvl2pPr>
             <a:lvl3pPr>
-              <a:defRPr sz="1600">
+              <a:defRPr sz="1360">
                 <a:solidFill>
                   <a:srgbClr val="FFFFFF"/>
                 </a:solidFill>
@@ -2564,7 +2564,7 @@
                 <a:spcPts val="0"/>
               </a:spcBef>
               <a:buNone/>
-              <a:defRPr sz="1200" b="1" cap="all">
+              <a:defRPr sz="1008" b="1" cap="all">
                 <a:solidFill>
                   <a:srgbClr val="000000"/>
                 </a:solidFill>
@@ -2609,7 +2609,7 @@
                 <a:spcPts val="0"/>
               </a:spcBef>
               <a:buNone/>
-              <a:defRPr sz="3600" b="1">
+              <a:defRPr sz="3863" b="1">
                 <a:solidFill>
                   <a:srgbClr val="000000"/>
                 </a:solidFill>
@@ -2675,7 +2675,7 @@
                 <a:spcPts val="0"/>
               </a:spcBef>
               <a:buNone/>
-              <a:defRPr sz="1800" b="0">
+              <a:defRPr sz="1679" b="0">
                 <a:solidFill>
                   <a:srgbClr val="000000"/>
                 </a:solidFill>
@@ -3109,7 +3109,7 @@
           <a:spcPct val="0"/>
         </a:spcBef>
         <a:buNone/>
-        <a:defRPr sz="2800" b="1" kern="1200" baseline="0">
+        <a:defRPr sz="2759" b="1" kern="1200" baseline="0">
           <a:solidFill>
             <a:schemeClr val="tx1"/>
           </a:solidFill>
@@ -3125,11 +3125,11 @@
           <a:spcPct val="100000"/>
         </a:lnSpc>
         <a:spcBef>
-          <a:spcPts val="1000"/>
+          <a:spcPts val="840"/>
         </a:spcBef>
         <a:buFont typeface="Arial"/>
         <a:buChar char="•"/>
-        <a:defRPr sz="2000" kern="1200">
+        <a:defRPr sz="1679" kern="1200">
           <a:solidFill>
             <a:schemeClr val="tx1"/>
           </a:solidFill>
@@ -3143,11 +3143,11 @@
           <a:spcPct val="100000"/>
         </a:lnSpc>
         <a:spcBef>
-          <a:spcPts val="500"/>
+          <a:spcPts val="504"/>
         </a:spcBef>
         <a:buFont typeface="Wingdings"/>
         <a:buChar char="§"/>
-        <a:defRPr sz="1800" kern="1200">
+        <a:defRPr sz="1511" kern="1200">
           <a:solidFill>
             <a:schemeClr val="tx1"/>
           </a:solidFill>
@@ -3161,11 +3161,11 @@
           <a:spcPct val="100000"/>
         </a:lnSpc>
         <a:spcBef>
-          <a:spcPts val="500"/>
+          <a:spcPts val="504"/>
         </a:spcBef>
         <a:buFont typeface="Courier New"/>
         <a:buChar char="o"/>
-        <a:defRPr sz="1600" kern="1200">
+        <a:defRPr sz="1360" kern="1200">
           <a:solidFill>
             <a:schemeClr val="tx1"/>
           </a:solidFill>
@@ -3179,11 +3179,11 @@
           <a:spcPct val="100000"/>
         </a:lnSpc>
         <a:spcBef>
-          <a:spcPts val="500"/>
+          <a:spcPts val="504"/>
         </a:spcBef>
         <a:buFont typeface="Arial"/>
         <a:buChar char="–"/>
-        <a:defRPr sz="1400" kern="1200">
+        <a:defRPr sz="1224" kern="1200">
           <a:solidFill>
             <a:schemeClr val="tx1"/>
           </a:solidFill>
@@ -3197,11 +3197,11 @@
           <a:spcPct val="100000"/>
         </a:lnSpc>
         <a:spcBef>
-          <a:spcPts val="500"/>
+          <a:spcPts val="504"/>
         </a:spcBef>
         <a:buFont typeface="Arial"/>
         <a:buChar char="»"/>
-        <a:defRPr sz="1200" kern="1200">
+        <a:defRPr sz="1102" kern="1200">
           <a:solidFill>
             <a:schemeClr val="tx1"/>
           </a:solidFill>
@@ -3211,7 +3211,7 @@
         </a:defRPr>
       </a:lvl5pPr>
       <a:lvl6pPr marL="1371600" indent="-228600" algn="l">
-        <a:defRPr sz="1200" kern="1200">
+        <a:defRPr sz="1102" kern="1200">
           <a:solidFill>
             <a:schemeClr val="tx1"/>
           </a:solidFill>
@@ -3219,7 +3219,7 @@
         </a:defRPr>
       </a:lvl6pPr>
       <a:lvl7pPr marL="1600200" indent="-228600" algn="l">
-        <a:defRPr sz="1200" kern="1200">
+        <a:defRPr sz="1102" kern="1200">
           <a:solidFill>
             <a:schemeClr val="tx1"/>
           </a:solidFill>
@@ -3227,7 +3227,7 @@
         </a:defRPr>
       </a:lvl7pPr>
       <a:lvl8pPr marL="1828800" indent="-228600" algn="l">
-        <a:defRPr sz="1200" kern="1200">
+        <a:defRPr sz="1102" kern="1200">
           <a:solidFill>
             <a:schemeClr val="tx1"/>
           </a:solidFill>
@@ -3235,7 +3235,7 @@
         </a:defRPr>
       </a:lvl8pPr>
       <a:lvl9pPr marL="2057400" indent="-228600" algn="l">
-        <a:defRPr sz="1200" kern="1200">
+        <a:defRPr sz="1102" kern="1200">
           <a:solidFill>
             <a:schemeClr val="tx1"/>
           </a:solidFill>
@@ -3248,7 +3248,7 @@
         <a:defRPr lang="en-US"/>
       </a:defPPr>
       <a:lvl1pPr marL="0" algn="l" defTabSz="457200">
-        <a:defRPr sz="1800" kern="1200">
+        <a:defRPr sz="1427" kern="1200">
           <a:solidFill>
             <a:schemeClr val="tx1"/>
           </a:solidFill>
@@ -3258,7 +3258,7 @@
         </a:defRPr>
       </a:lvl1pPr>
       <a:lvl2pPr marL="457200" algn="l" defTabSz="457200">
-        <a:defRPr sz="1800" kern="1200">
+        <a:defRPr sz="1427" kern="1200">
           <a:solidFill>
             <a:schemeClr val="tx1"/>
           </a:solidFill>
@@ -3268,7 +3268,7 @@
         </a:defRPr>
       </a:lvl2pPr>
       <a:lvl3pPr marL="914400" algn="l" defTabSz="457200">
-        <a:defRPr sz="1800" kern="1200">
+        <a:defRPr sz="1427" kern="1200">
           <a:solidFill>
             <a:schemeClr val="tx1"/>
           </a:solidFill>
@@ -3278,7 +3278,7 @@
         </a:defRPr>
       </a:lvl3pPr>
       <a:lvl4pPr marL="1371600" algn="l" defTabSz="457200">
-        <a:defRPr sz="1800" kern="1200">
+        <a:defRPr sz="1427" kern="1200">
           <a:solidFill>
             <a:schemeClr val="tx1"/>
           </a:solidFill>
@@ -3288,7 +3288,7 @@
         </a:defRPr>
       </a:lvl4pPr>
       <a:lvl5pPr marL="1828800" algn="l" defTabSz="457200">
-        <a:defRPr sz="1800" kern="1200">
+        <a:defRPr sz="1427" kern="1200">
           <a:solidFill>
             <a:schemeClr val="tx1"/>
           </a:solidFill>
@@ -3298,7 +3298,7 @@
         </a:defRPr>
       </a:lvl5pPr>
       <a:lvl6pPr marL="2286000" algn="l" defTabSz="457200">
-        <a:defRPr sz="1800" kern="1200">
+        <a:defRPr sz="1427" kern="1200">
           <a:solidFill>
             <a:schemeClr val="tx1"/>
           </a:solidFill>
@@ -3308,7 +3308,7 @@
         </a:defRPr>
       </a:lvl6pPr>
       <a:lvl7pPr marL="2743200" algn="l" defTabSz="457200">
-        <a:defRPr sz="1800" kern="1200">
+        <a:defRPr sz="1427" kern="1200">
           <a:solidFill>
             <a:schemeClr val="tx1"/>
           </a:solidFill>
@@ -3318,7 +3318,7 @@
         </a:defRPr>
       </a:lvl7pPr>
       <a:lvl8pPr marL="3200400" algn="l" defTabSz="457200">
-        <a:defRPr sz="1800" kern="1200">
+        <a:defRPr sz="1427" kern="1200">
           <a:solidFill>
             <a:schemeClr val="tx1"/>
           </a:solidFill>
@@ -3328,7 +3328,7 @@
         </a:defRPr>
       </a:lvl8pPr>
       <a:lvl9pPr marL="3657600" algn="l" defTabSz="457200">
-        <a:defRPr sz="1800" kern="1200">
+        <a:defRPr sz="1427" kern="1200">
           <a:solidFill>
             <a:schemeClr val="tx1"/>
           </a:solidFill>

--- a/docs/common/liveries/nsi/template.pptx
+++ b/docs/common/liveries/nsi/template.pptx
@@ -210,7 +210,7 @@
                 <a:spcPts val="0"/>
               </a:spcBef>
               <a:buNone/>
-              <a:defRPr sz="1008" b="1" cap="all">
+              <a:defRPr sz="2800" b="1" cap="all">
                 <a:solidFill>
                   <a:srgbClr val="000000"/>
                 </a:solidFill>
@@ -255,7 +255,7 @@
                 <a:spcPts val="0"/>
               </a:spcBef>
               <a:buNone/>
-              <a:defRPr sz="3863" b="1">
+              <a:defRPr sz="4800" b="1">
                 <a:solidFill>
                   <a:srgbClr val="000000"/>
                 </a:solidFill>
@@ -321,7 +321,7 @@
                 <a:spcPts val="0"/>
               </a:spcBef>
               <a:buNone/>
-              <a:defRPr sz="1679" b="0">
+              <a:defRPr sz="2800" b="0">
                 <a:solidFill>
                   <a:srgbClr val="000000"/>
                 </a:solidFill>
@@ -357,7 +357,7 @@
           <a:bodyPr anchor="ctr"/>
           <a:lstStyle>
             <a:lvl1pPr algn="ctr">
-              <a:defRPr sz="1200" b="1">
+              <a:defRPr sz="900" b="1">
                 <a:solidFill>
                   <a:srgbClr val="000000"/>
                 </a:solidFill>
@@ -541,7 +541,7 @@
               <a:lnSpc>
                 <a:spcPct val="90000"/>
               </a:lnSpc>
-              <a:defRPr sz="4366" b="1">
+              <a:defRPr sz="4800" b="1">
                 <a:solidFill>
                   <a:srgbClr val="000000"/>
                 </a:solidFill>
@@ -582,21 +582,21 @@
           </a:bodyPr>
           <a:lstStyle>
             <a:lvl1pPr>
-              <a:defRPr sz="1679">
+              <a:defRPr sz="1600">
                 <a:solidFill>
                   <a:srgbClr val="000000"/>
                 </a:solidFill>
               </a:defRPr>
             </a:lvl1pPr>
             <a:lvl2pPr>
-              <a:defRPr sz="1511">
+              <a:defRPr sz="1400">
                 <a:solidFill>
                   <a:srgbClr val="000000"/>
                 </a:solidFill>
               </a:defRPr>
             </a:lvl2pPr>
             <a:lvl3pPr>
-              <a:defRPr sz="1360">
+              <a:defRPr sz="1300">
                 <a:solidFill>
                   <a:srgbClr val="000000"/>
                 </a:solidFill>
@@ -631,7 +631,7 @@
           <a:bodyPr anchor="ctr"/>
           <a:lstStyle>
             <a:lvl1pPr algn="ctr">
-              <a:defRPr sz="1200" b="1">
+              <a:defRPr sz="900" b="1">
                 <a:solidFill>
                   <a:srgbClr val="000000"/>
                 </a:solidFill>
@@ -823,7 +823,7 @@
           <a:bodyPr anchor="ctr"/>
           <a:lstStyle>
             <a:lvl1pPr algn="ctr">
-              <a:defRPr sz="1200" b="1">
+              <a:defRPr sz="900" b="1">
                 <a:solidFill>
                   <a:schemeClr val="tx1"/>
                 </a:solidFill>
@@ -1023,7 +1023,7 @@
               <a:lnSpc>
                 <a:spcPct val="90000"/>
               </a:lnSpc>
-              <a:defRPr sz="4366" b="1" cap="none" baseline="0">
+              <a:defRPr sz="6000" b="1" cap="none" baseline="0">
                 <a:solidFill>
                   <a:srgbClr val="000000"/>
                 </a:solidFill>
@@ -1068,7 +1068,7 @@
                 <a:spcPts val="0"/>
               </a:spcBef>
               <a:buNone/>
-              <a:defRPr sz="1847" b="0">
+              <a:defRPr sz="2000" b="0">
                 <a:solidFill>
                   <a:srgbClr val="000000"/>
                 </a:solidFill>
@@ -1104,7 +1104,7 @@
           <a:bodyPr anchor="ctr"/>
           <a:lstStyle>
             <a:lvl1pPr algn="ctr">
-              <a:defRPr sz="1200" b="1">
+              <a:defRPr sz="900" b="1">
                 <a:solidFill>
                   <a:srgbClr val="000000"/>
                 </a:solidFill>
@@ -1326,7 +1326,7 @@
           <a:bodyPr anchor="ctr"/>
           <a:lstStyle>
             <a:lvl1pPr algn="ctr">
-              <a:defRPr sz="1200" b="1">
+              <a:defRPr sz="900" b="1">
                 <a:solidFill>
                   <a:schemeClr val="tx1"/>
                 </a:solidFill>
@@ -1494,7 +1494,7 @@
           <a:lstStyle>
             <a:lvl1pPr marL="0" indent="0">
               <a:buNone/>
-              <a:defRPr sz="1847" b="1">
+              <a:defRPr sz="2000" b="1">
                 <a:solidFill>
                   <a:schemeClr val="tx2"/>
                 </a:solidFill>
@@ -1565,7 +1565,7 @@
           <a:lstStyle>
             <a:lvl1pPr marL="0" indent="0">
               <a:buNone/>
-              <a:defRPr sz="1847" b="1">
+              <a:defRPr sz="2000" b="1">
                 <a:solidFill>
                   <a:schemeClr val="tx2"/>
                 </a:solidFill>
@@ -1630,7 +1630,7 @@
           <a:bodyPr anchor="ctr"/>
           <a:lstStyle>
             <a:lvl1pPr algn="ctr">
-              <a:defRPr sz="1200" b="1">
+              <a:defRPr sz="900" b="1">
                 <a:solidFill>
                   <a:schemeClr val="tx1"/>
                 </a:solidFill>
@@ -1771,7 +1771,7 @@
           </a:bodyPr>
           <a:lstStyle>
             <a:lvl1pPr algn="l">
-              <a:defRPr sz="1847" b="1"/>
+              <a:defRPr sz="2000" b="1"/>
             </a:lvl1pPr>
           </a:lstStyle>
           <a:p>
@@ -1838,7 +1838,7 @@
           <a:lstStyle>
             <a:lvl1pPr marL="0" indent="0">
               <a:buNone/>
-              <a:defRPr sz="1427"/>
+              <a:defRPr sz="1300"/>
             </a:lvl1pPr>
           </a:lstStyle>
           <a:p>
@@ -1869,7 +1869,7 @@
           <a:bodyPr anchor="ctr"/>
           <a:lstStyle>
             <a:lvl1pPr algn="ctr">
-              <a:defRPr sz="1200" b="1">
+              <a:defRPr sz="900" b="1">
                 <a:solidFill>
                   <a:schemeClr val="tx1"/>
                 </a:solidFill>
@@ -2005,7 +2005,7 @@
           <a:bodyPr anchor="ctr"/>
           <a:lstStyle>
             <a:lvl1pPr algn="ctr">
-              <a:defRPr sz="1200" b="1">
+              <a:defRPr sz="900" b="1">
                 <a:solidFill>
                   <a:schemeClr val="tx1"/>
                 </a:solidFill>
@@ -2251,7 +2251,7 @@
               <a:lnSpc>
                 <a:spcPct val="90000"/>
               </a:lnSpc>
-              <a:defRPr sz="4366" b="1">
+              <a:defRPr sz="4800" b="1">
                 <a:solidFill>
                   <a:srgbClr val="FFFFFF"/>
                 </a:solidFill>
@@ -2292,21 +2292,21 @@
           </a:bodyPr>
           <a:lstStyle>
             <a:lvl1pPr>
-              <a:defRPr sz="1679">
+              <a:defRPr sz="1600">
                 <a:solidFill>
                   <a:srgbClr val="FFFFFF"/>
                 </a:solidFill>
               </a:defRPr>
             </a:lvl1pPr>
             <a:lvl2pPr>
-              <a:defRPr sz="1511">
+              <a:defRPr sz="1400">
                 <a:solidFill>
                   <a:srgbClr val="FFFFFF"/>
                 </a:solidFill>
               </a:defRPr>
             </a:lvl2pPr>
             <a:lvl3pPr>
-              <a:defRPr sz="1360">
+              <a:defRPr sz="1300">
                 <a:solidFill>
                   <a:srgbClr val="FFFFFF"/>
                 </a:solidFill>
@@ -2341,7 +2341,7 @@
           <a:bodyPr anchor="ctr"/>
           <a:lstStyle>
             <a:lvl1pPr algn="ctr">
-              <a:defRPr sz="1200" b="1">
+              <a:defRPr sz="900" b="1">
                 <a:solidFill>
                   <a:srgbClr val="FFFFFF"/>
                 </a:solidFill>
@@ -2564,7 +2564,7 @@
                 <a:spcPts val="0"/>
               </a:spcBef>
               <a:buNone/>
-              <a:defRPr sz="1008" b="1" cap="all">
+              <a:defRPr sz="2800" b="1" cap="all">
                 <a:solidFill>
                   <a:srgbClr val="000000"/>
                 </a:solidFill>
@@ -2609,7 +2609,7 @@
                 <a:spcPts val="0"/>
               </a:spcBef>
               <a:buNone/>
-              <a:defRPr sz="3863" b="1">
+              <a:defRPr sz="4800" b="1">
                 <a:solidFill>
                   <a:srgbClr val="000000"/>
                 </a:solidFill>
@@ -2675,7 +2675,7 @@
                 <a:spcPts val="0"/>
               </a:spcBef>
               <a:buNone/>
-              <a:defRPr sz="1679" b="0">
+              <a:defRPr sz="2800" b="0">
                 <a:solidFill>
                   <a:srgbClr val="000000"/>
                 </a:solidFill>
@@ -2711,7 +2711,7 @@
           <a:bodyPr anchor="ctr"/>
           <a:lstStyle>
             <a:lvl1pPr algn="ctr">
-              <a:defRPr sz="1200" b="1">
+              <a:defRPr sz="900" b="1">
                 <a:solidFill>
                   <a:srgbClr val="000000"/>
                 </a:solidFill>
@@ -2948,7 +2948,7 @@
           <a:bodyPr anchor="ctr"/>
           <a:lstStyle>
             <a:lvl1pPr algn="ctr">
-              <a:defRPr sz="1200" b="1">
+              <a:defRPr sz="900" b="1">
                 <a:solidFill>
                   <a:schemeClr val="tx1"/>
                 </a:solidFill>
@@ -3109,7 +3109,7 @@
           <a:spcPct val="0"/>
         </a:spcBef>
         <a:buNone/>
-        <a:defRPr sz="2759" b="1" kern="1200" baseline="0">
+        <a:defRPr sz="3200" b="1" kern="1200" baseline="0">
           <a:solidFill>
             <a:schemeClr val="tx1"/>
           </a:solidFill>
@@ -3125,11 +3125,11 @@
           <a:spcPct val="100000"/>
         </a:lnSpc>
         <a:spcBef>
-          <a:spcPts val="840"/>
+          <a:spcPts val="800"/>
         </a:spcBef>
         <a:buFont typeface="Arial"/>
         <a:buChar char="•"/>
-        <a:defRPr sz="1679" kern="1200">
+        <a:defRPr sz="1600" kern="1200">
           <a:solidFill>
             <a:schemeClr val="tx1"/>
           </a:solidFill>
@@ -3143,11 +3143,11 @@
           <a:spcPct val="100000"/>
         </a:lnSpc>
         <a:spcBef>
-          <a:spcPts val="504"/>
+          <a:spcPts val="480"/>
         </a:spcBef>
         <a:buFont typeface="Wingdings"/>
         <a:buChar char="§"/>
-        <a:defRPr sz="1511" kern="1200">
+        <a:defRPr sz="1400" kern="1200">
           <a:solidFill>
             <a:schemeClr val="tx1"/>
           </a:solidFill>
@@ -3161,11 +3161,11 @@
           <a:spcPct val="100000"/>
         </a:lnSpc>
         <a:spcBef>
-          <a:spcPts val="504"/>
+          <a:spcPts val="480"/>
         </a:spcBef>
         <a:buFont typeface="Courier New"/>
         <a:buChar char="o"/>
-        <a:defRPr sz="1360" kern="1200">
+        <a:defRPr sz="1300" kern="1200">
           <a:solidFill>
             <a:schemeClr val="tx1"/>
           </a:solidFill>
@@ -3179,11 +3179,11 @@
           <a:spcPct val="100000"/>
         </a:lnSpc>
         <a:spcBef>
-          <a:spcPts val="504"/>
+          <a:spcPts val="480"/>
         </a:spcBef>
         <a:buFont typeface="Arial"/>
         <a:buChar char="–"/>
-        <a:defRPr sz="1224" kern="1200">
+        <a:defRPr sz="1200" kern="1200">
           <a:solidFill>
             <a:schemeClr val="tx1"/>
           </a:solidFill>
@@ -3197,11 +3197,11 @@
           <a:spcPct val="100000"/>
         </a:lnSpc>
         <a:spcBef>
-          <a:spcPts val="504"/>
+          <a:spcPts val="480"/>
         </a:spcBef>
         <a:buFont typeface="Arial"/>
         <a:buChar char="»"/>
-        <a:defRPr sz="1102" kern="1200">
+        <a:defRPr sz="1100" kern="1200">
           <a:solidFill>
             <a:schemeClr val="tx1"/>
           </a:solidFill>
@@ -3211,7 +3211,7 @@
         </a:defRPr>
       </a:lvl5pPr>
       <a:lvl6pPr marL="1371600" indent="-228600" algn="l">
-        <a:defRPr sz="1102" kern="1200">
+        <a:defRPr sz="1100" kern="1200">
           <a:solidFill>
             <a:schemeClr val="tx1"/>
           </a:solidFill>
@@ -3219,7 +3219,7 @@
         </a:defRPr>
       </a:lvl6pPr>
       <a:lvl7pPr marL="1600200" indent="-228600" algn="l">
-        <a:defRPr sz="1102" kern="1200">
+        <a:defRPr sz="1100" kern="1200">
           <a:solidFill>
             <a:schemeClr val="tx1"/>
           </a:solidFill>
@@ -3227,7 +3227,7 @@
         </a:defRPr>
       </a:lvl7pPr>
       <a:lvl8pPr marL="1828800" indent="-228600" algn="l">
-        <a:defRPr sz="1102" kern="1200">
+        <a:defRPr sz="1100" kern="1200">
           <a:solidFill>
             <a:schemeClr val="tx1"/>
           </a:solidFill>
@@ -3235,7 +3235,7 @@
         </a:defRPr>
       </a:lvl8pPr>
       <a:lvl9pPr marL="2057400" indent="-228600" algn="l">
-        <a:defRPr sz="1102" kern="1200">
+        <a:defRPr sz="1100" kern="1200">
           <a:solidFill>
             <a:schemeClr val="tx1"/>
           </a:solidFill>
@@ -3248,7 +3248,7 @@
         <a:defRPr lang="en-US"/>
       </a:defPPr>
       <a:lvl1pPr marL="0" algn="l" defTabSz="457200">
-        <a:defRPr sz="1427" kern="1200">
+        <a:defRPr sz="1300" kern="1200">
           <a:solidFill>
             <a:schemeClr val="tx1"/>
           </a:solidFill>
@@ -3258,7 +3258,7 @@
         </a:defRPr>
       </a:lvl1pPr>
       <a:lvl2pPr marL="457200" algn="l" defTabSz="457200">
-        <a:defRPr sz="1427" kern="1200">
+        <a:defRPr sz="1300" kern="1200">
           <a:solidFill>
             <a:schemeClr val="tx1"/>
           </a:solidFill>
@@ -3268,7 +3268,7 @@
         </a:defRPr>
       </a:lvl2pPr>
       <a:lvl3pPr marL="914400" algn="l" defTabSz="457200">
-        <a:defRPr sz="1427" kern="1200">
+        <a:defRPr sz="1300" kern="1200">
           <a:solidFill>
             <a:schemeClr val="tx1"/>
           </a:solidFill>
@@ -3278,7 +3278,7 @@
         </a:defRPr>
       </a:lvl3pPr>
       <a:lvl4pPr marL="1371600" algn="l" defTabSz="457200">
-        <a:defRPr sz="1427" kern="1200">
+        <a:defRPr sz="1300" kern="1200">
           <a:solidFill>
             <a:schemeClr val="tx1"/>
           </a:solidFill>
@@ -3288,7 +3288,7 @@
         </a:defRPr>
       </a:lvl4pPr>
       <a:lvl5pPr marL="1828800" algn="l" defTabSz="457200">
-        <a:defRPr sz="1427" kern="1200">
+        <a:defRPr sz="1300" kern="1200">
           <a:solidFill>
             <a:schemeClr val="tx1"/>
           </a:solidFill>
@@ -3298,7 +3298,7 @@
         </a:defRPr>
       </a:lvl5pPr>
       <a:lvl6pPr marL="2286000" algn="l" defTabSz="457200">
-        <a:defRPr sz="1427" kern="1200">
+        <a:defRPr sz="1300" kern="1200">
           <a:solidFill>
             <a:schemeClr val="tx1"/>
           </a:solidFill>
@@ -3308,7 +3308,7 @@
         </a:defRPr>
       </a:lvl6pPr>
       <a:lvl7pPr marL="2743200" algn="l" defTabSz="457200">
-        <a:defRPr sz="1427" kern="1200">
+        <a:defRPr sz="1300" kern="1200">
           <a:solidFill>
             <a:schemeClr val="tx1"/>
           </a:solidFill>
@@ -3318,7 +3318,7 @@
         </a:defRPr>
       </a:lvl7pPr>
       <a:lvl8pPr marL="3200400" algn="l" defTabSz="457200">
-        <a:defRPr sz="1427" kern="1200">
+        <a:defRPr sz="1300" kern="1200">
           <a:solidFill>
             <a:schemeClr val="tx1"/>
           </a:solidFill>
@@ -3328,7 +3328,7 @@
         </a:defRPr>
       </a:lvl8pPr>
       <a:lvl9pPr marL="3657600" algn="l" defTabSz="457200">
-        <a:defRPr sz="1427" kern="1200">
+        <a:defRPr sz="1300" kern="1200">
           <a:solidFill>
             <a:schemeClr val="tx1"/>
           </a:solidFill>

--- a/docs/common/liveries/nsi/template.pptx
+++ b/docs/common/liveries/nsi/template.pptx
@@ -321,7 +321,7 @@
                 <a:spcPts val="0"/>
               </a:spcBef>
               <a:buNone/>
-              <a:defRPr sz="2800" b="0">
+              <a:defRPr sz="2000" b="0">
                 <a:solidFill>
                   <a:srgbClr val="000000"/>
                 </a:solidFill>
@@ -2675,7 +2675,7 @@
                 <a:spcPts val="0"/>
               </a:spcBef>
               <a:buNone/>
-              <a:defRPr sz="2800" b="0">
+              <a:defRPr sz="2000" b="0">
                 <a:solidFill>
                   <a:srgbClr val="000000"/>
                 </a:solidFill>

--- a/docs/common/liveries/nsi/template.pptx
+++ b/docs/common/liveries/nsi/template.pptx
@@ -785,8 +785,8 @@
         </p:nvSpPr>
         <p:spPr>
           <a:xfrm>
-            <a:off x="731520" y="1143229"/>
-            <a:ext cx="10728960" cy="5181219"/>
+            <a:off x="731520" y="1352398"/>
+            <a:ext cx="10728960" cy="4972050"/>
           </a:xfrm>
           <a:prstGeom prst="rect">
             <a:avLst/>
@@ -1258,8 +1258,8 @@
         </p:nvSpPr>
         <p:spPr>
           <a:xfrm>
-            <a:off x="731520" y="1143229"/>
-            <a:ext cx="5181600" cy="5181219"/>
+            <a:off x="731520" y="1352398"/>
+            <a:ext cx="5181600" cy="4972050"/>
           </a:xfrm>
           <a:prstGeom prst="rect">
             <a:avLst/>
@@ -1288,8 +1288,8 @@
         </p:nvSpPr>
         <p:spPr>
           <a:xfrm>
-            <a:off x="6278880" y="1143229"/>
-            <a:ext cx="5181600" cy="5181219"/>
+            <a:off x="6278880" y="1352398"/>
+            <a:ext cx="5181600" cy="4972050"/>
           </a:xfrm>
           <a:prstGeom prst="rect">
             <a:avLst/>
@@ -1480,7 +1480,7 @@
         </p:nvSpPr>
         <p:spPr>
           <a:xfrm>
-            <a:off x="731520" y="1143229"/>
+            <a:off x="731520" y="1352398"/>
             <a:ext cx="5181600" cy="617220"/>
           </a:xfrm>
           <a:prstGeom prst="rect">
@@ -1521,8 +1521,8 @@
         </p:nvSpPr>
         <p:spPr>
           <a:xfrm>
-            <a:off x="731520" y="1829029"/>
-            <a:ext cx="5181600" cy="4495419"/>
+            <a:off x="731520" y="2038198"/>
+            <a:ext cx="5181600" cy="4286250"/>
           </a:xfrm>
           <a:prstGeom prst="rect">
             <a:avLst/>
@@ -1551,7 +1551,7 @@
         </p:nvSpPr>
         <p:spPr>
           <a:xfrm>
-            <a:off x="6278880" y="1143229"/>
+            <a:off x="6278880" y="1352398"/>
             <a:ext cx="5181600" cy="617220"/>
           </a:xfrm>
           <a:prstGeom prst="rect">
@@ -1592,8 +1592,8 @@
         </p:nvSpPr>
         <p:spPr>
           <a:xfrm>
-            <a:off x="6278880" y="1829029"/>
-            <a:ext cx="5181600" cy="4495419"/>
+            <a:off x="6278880" y="2038198"/>
+            <a:ext cx="5181600" cy="4286250"/>
           </a:xfrm>
           <a:prstGeom prst="rect">
             <a:avLst/>
@@ -1758,7 +1758,7 @@
         </p:nvSpPr>
         <p:spPr>
           <a:xfrm>
-            <a:off x="731520" y="1143229"/>
+            <a:off x="731520" y="1352398"/>
             <a:ext cx="4023360" cy="891540"/>
           </a:xfrm>
           <a:prstGeom prst="rect">
@@ -1794,8 +1794,8 @@
         </p:nvSpPr>
         <p:spPr>
           <a:xfrm>
-            <a:off x="5120640" y="1143229"/>
-            <a:ext cx="6339840" cy="5181219"/>
+            <a:off x="5120640" y="1352398"/>
+            <a:ext cx="6339840" cy="4972050"/>
           </a:xfrm>
           <a:prstGeom prst="rect">
             <a:avLst/>
@@ -1824,8 +1824,8 @@
         </p:nvSpPr>
         <p:spPr>
           <a:xfrm>
-            <a:off x="731520" y="2103349"/>
-            <a:ext cx="4023360" cy="4221099"/>
+            <a:off x="731520" y="2312518"/>
+            <a:ext cx="4023360" cy="4011930"/>
           </a:xfrm>
           <a:prstGeom prst="rect">
             <a:avLst/>
@@ -2820,51 +2820,6 @@
       </p:pic>
       <p:sp>
         <p:nvSpPr>
-          <p:cNvPr id="11" name="Title tab"/>
-          <p:cNvSpPr/>
-          <p:nvPr userDrawn="1"/>
-        </p:nvSpPr>
-        <p:spPr>
-          <a:xfrm>
-            <a:off x="0" y="336042"/>
-            <a:ext cx="219456" cy="654253"/>
-          </a:xfrm>
-          <a:prstGeom prst="rect">
-            <a:avLst/>
-          </a:prstGeom>
-          <a:solidFill>
-            <a:schemeClr val="accent4"/>
-          </a:solidFill>
-          <a:ln>
-            <a:noFill/>
-          </a:ln>
-        </p:spPr>
-      </p:sp>
-      <p:cxnSp>
-        <p:nvCxnSpPr>
-          <p:cNvPr id="12" name="Title rule"/>
-          <p:cNvCxnSpPr/>
-          <p:nvPr userDrawn="1"/>
-        </p:nvCxnSpPr>
-        <p:spPr>
-          <a:xfrm>
-            <a:off x="731520" y="990295"/>
-            <a:ext cx="10728960" cy="0"/>
-          </a:xfrm>
-          <a:prstGeom prst="line">
-            <a:avLst/>
-          </a:prstGeom>
-          <a:ln w="9525">
-            <a:solidFill>
-              <a:schemeClr val="tx1">
-                <a:alpha val="30000"/>
-              </a:schemeClr>
-            </a:solidFill>
-          </a:ln>
-        </p:spPr>
-      </p:cxnSp>
-      <p:sp>
-        <p:nvSpPr>
           <p:cNvPr id="13" name="Title Placeholder"/>
           <p:cNvSpPr>
             <a:spLocks noGrp="1"/>
@@ -2875,8 +2830,8 @@
         </p:nvSpPr>
         <p:spPr>
           <a:xfrm>
-            <a:off x="2103082" y="336042"/>
-            <a:ext cx="9357398" cy="654253"/>
+            <a:off x="2181949" y="336042"/>
+            <a:ext cx="9278531" cy="654253"/>
           </a:xfrm>
           <a:prstGeom prst="rect">
             <a:avLst/>
@@ -2907,8 +2862,8 @@
         </p:nvSpPr>
         <p:spPr>
           <a:xfrm>
-            <a:off x="731520" y="1143229"/>
-            <a:ext cx="10728960" cy="5181219"/>
+            <a:off x="731520" y="1352398"/>
+            <a:ext cx="10728960" cy="4972050"/>
           </a:xfrm>
           <a:prstGeom prst="rect">
             <a:avLst/>
@@ -3055,8 +3010,8 @@
         </p:blipFill>
         <p:spPr>
           <a:xfrm>
-            <a:off x="731520" y="365531"/>
-            <a:ext cx="1066762" cy="582930"/>
+            <a:off x="182880" y="274320"/>
+            <a:ext cx="1694269" cy="925830"/>
           </a:xfrm>
           <a:prstGeom prst="rect">
             <a:avLst/>
@@ -3104,7 +3059,7 @@
   </p:sldLayoutIdLst>
   <p:txStyles>
     <p:titleStyle>
-      <a:lvl1pPr algn="l" defTabSz="457200" rtl="0" eaLnBrk="1" latinLnBrk="0" hangingPunct="1">
+      <a:lvl1pPr algn="ctr" defTabSz="457200" rtl="0" eaLnBrk="1" latinLnBrk="0" hangingPunct="1">
         <a:spcBef>
           <a:spcPct val="0"/>
         </a:spcBef>
